--- a/apresentacao/InformalidadeBR - Apresentacao.pptx
+++ b/apresentacao/InformalidadeBR - Apresentacao.pptx
@@ -21,6 +21,7 @@
     <p:sldId id="269" r:id="rId20"/>
     <p:sldId id="270" r:id="rId21"/>
     <p:sldId id="271" r:id="rId22"/>
+    <p:sldId id="272" r:id="rId23"/>
   </p:sldIdLst>
   <p:sldSz cx="12191695" cy="6858000" type="screen4x3"/>
   <p:notesSz cx="6858000" cy="9144000"/>
@@ -3586,45 +3587,6 @@
         <p:spPr>
           <a:xfrm>
             <a:off x="685800" y="502920"/>
-            <a:ext cx="8229600" cy="365760"/>
-          </a:xfrm>
-          <a:prstGeom prst="rect">
-            <a:avLst/>
-          </a:prstGeom>
-          <a:noFill/>
-        </p:spPr>
-        <p:txBody>
-          <a:bodyPr wrap="square" anchor="t" lIns="0" rIns="0" tIns="0" bIns="0">
-            <a:spAutoFit/>
-          </a:bodyPr>
-          <a:lstStyle/>
-          <a:p>
-            <a:pPr algn="l">
-              <a:lnSpc>
-                <a:spcPct val="100000"/>
-              </a:lnSpc>
-            </a:pPr>
-            <a:r>
-              <a:rPr sz="1300" b="1" spc="150">
-                <a:solidFill>
-                  <a:srgbClr val="EB0029"/>
-                </a:solidFill>
-                <a:latin typeface="Arial"/>
-              </a:rPr>
-              <a:t>RESULTADOS</a:t>
-            </a:r>
-          </a:p>
-        </p:txBody>
-      </p:sp>
-      <p:sp>
-        <p:nvSpPr>
-          <p:cNvPr id="6" name="TextBox 5"/>
-          <p:cNvSpPr txBox="1"/>
-          <p:nvPr/>
-        </p:nvSpPr>
-        <p:spPr>
-          <a:xfrm>
-            <a:off x="685800" y="868680"/>
             <a:ext cx="10607040" cy="1188720"/>
           </a:xfrm>
           <a:prstGeom prst="rect">
@@ -3644,9 +3606,48 @@
               </a:lnSpc>
             </a:pPr>
             <a:r>
-              <a:rPr sz="2900" b="1">
+              <a:rPr sz="3200" b="1">
                 <a:solidFill>
                   <a:srgbClr val="1A1A1A"/>
+                </a:solidFill>
+                <a:latin typeface="Arial"/>
+              </a:rPr>
+              <a:t>Resultados</a:t>
+            </a:r>
+          </a:p>
+        </p:txBody>
+      </p:sp>
+      <p:sp>
+        <p:nvSpPr>
+          <p:cNvPr id="6" name="TextBox 5"/>
+          <p:cNvSpPr txBox="1"/>
+          <p:nvPr/>
+        </p:nvSpPr>
+        <p:spPr>
+          <a:xfrm>
+            <a:off x="685800" y="1170432"/>
+            <a:ext cx="10607040" cy="777240"/>
+          </a:xfrm>
+          <a:prstGeom prst="rect">
+            <a:avLst/>
+          </a:prstGeom>
+          <a:noFill/>
+        </p:spPr>
+        <p:txBody>
+          <a:bodyPr wrap="square" anchor="t" lIns="0" rIns="0" tIns="0" bIns="0">
+            <a:spAutoFit/>
+          </a:bodyPr>
+          <a:lstStyle/>
+          <a:p>
+            <a:pPr algn="l">
+              <a:lnSpc>
+                <a:spcPct val="120000"/>
+              </a:lnSpc>
+            </a:pPr>
+            <a:r>
+              <a:rPr sz="1650" b="0">
+                <a:solidFill>
+                  <a:srgbClr val="6E6E6E"/>
                 </a:solidFill>
                 <a:latin typeface="Arial"/>
               </a:rPr>
@@ -4520,7 +4521,46 @@
       </p:pic>
       <p:sp>
         <p:nvSpPr>
-          <p:cNvPr id="13" name="Oval 12">
+          <p:cNvPr id="13" name="TextBox 12"/>
+          <p:cNvSpPr txBox="1"/>
+          <p:nvPr/>
+        </p:nvSpPr>
+        <p:spPr>
+          <a:xfrm>
+            <a:off x="8513064" y="1453896"/>
+            <a:ext cx="2377440" cy="219456"/>
+          </a:xfrm>
+          <a:prstGeom prst="rect">
+            <a:avLst/>
+          </a:prstGeom>
+          <a:noFill/>
+        </p:spPr>
+        <p:txBody>
+          <a:bodyPr wrap="none" anchor="t" lIns="0" rIns="0" tIns="0" bIns="0">
+            <a:spAutoFit/>
+          </a:bodyPr>
+          <a:lstStyle/>
+          <a:p>
+            <a:pPr algn="r">
+              <a:lnSpc>
+                <a:spcPct val="100000"/>
+              </a:lnSpc>
+            </a:pPr>
+            <a:r>
+              <a:rPr sz="1000" b="1" spc="40">
+                <a:solidFill>
+                  <a:srgbClr val="6E6E6E"/>
+                </a:solidFill>
+                <a:latin typeface="Arial"/>
+              </a:rPr>
+              <a:t>MATRIZES DE CONFUSÃO</a:t>
+            </a:r>
+          </a:p>
+        </p:txBody>
+      </p:sp>
+      <p:sp>
+        <p:nvSpPr>
+          <p:cNvPr id="14" name="Oval 13">
             <a:hlinkClick action="ppaction://hlinksldjump" r:id="rId4"/>
           </p:cNvPr>
           <p:cNvSpPr/>
@@ -4712,7 +4752,85 @@
         <p:spPr>
           <a:xfrm>
             <a:off x="685800" y="502920"/>
-            <a:ext cx="8229600" cy="365760"/>
+            <a:ext cx="10607040" cy="1188720"/>
+          </a:xfrm>
+          <a:prstGeom prst="rect">
+            <a:avLst/>
+          </a:prstGeom>
+          <a:noFill/>
+        </p:spPr>
+        <p:txBody>
+          <a:bodyPr wrap="square" anchor="t" lIns="0" rIns="0" tIns="0" bIns="0">
+            <a:spAutoFit/>
+          </a:bodyPr>
+          <a:lstStyle/>
+          <a:p>
+            <a:pPr algn="l">
+              <a:lnSpc>
+                <a:spcPct val="102000"/>
+              </a:lnSpc>
+            </a:pPr>
+            <a:r>
+              <a:rPr sz="3200" b="1">
+                <a:solidFill>
+                  <a:srgbClr val="1A1A1A"/>
+                </a:solidFill>
+                <a:latin typeface="Arial"/>
+              </a:rPr>
+              <a:t>Conclusão Geral</a:t>
+            </a:r>
+          </a:p>
+        </p:txBody>
+      </p:sp>
+      <p:sp>
+        <p:nvSpPr>
+          <p:cNvPr id="6" name="TextBox 5"/>
+          <p:cNvSpPr txBox="1"/>
+          <p:nvPr/>
+        </p:nvSpPr>
+        <p:spPr>
+          <a:xfrm>
+            <a:off x="685800" y="1170432"/>
+            <a:ext cx="10607040" cy="777240"/>
+          </a:xfrm>
+          <a:prstGeom prst="rect">
+            <a:avLst/>
+          </a:prstGeom>
+          <a:noFill/>
+        </p:spPr>
+        <p:txBody>
+          <a:bodyPr wrap="square" anchor="t" lIns="0" rIns="0" tIns="0" bIns="0">
+            <a:spAutoFit/>
+          </a:bodyPr>
+          <a:lstStyle/>
+          <a:p>
+            <a:pPr algn="l">
+              <a:lnSpc>
+                <a:spcPct val="120000"/>
+              </a:lnSpc>
+            </a:pPr>
+            <a:r>
+              <a:rPr sz="1650" b="0">
+                <a:solidFill>
+                  <a:srgbClr val="6E6E6E"/>
+                </a:solidFill>
+                <a:latin typeface="Arial"/>
+              </a:rPr>
+              <a:t>Sobre o modelo, e sobre o problema que ele tenta resolver</a:t>
+            </a:r>
+          </a:p>
+        </p:txBody>
+      </p:sp>
+      <p:sp>
+        <p:nvSpPr>
+          <p:cNvPr id="7" name="TextBox 6"/>
+          <p:cNvSpPr txBox="1"/>
+          <p:nvPr/>
+        </p:nvSpPr>
+        <p:spPr>
+          <a:xfrm>
+            <a:off x="685800" y="6355080"/>
+            <a:ext cx="2743200" cy="320040"/>
           </a:xfrm>
           <a:prstGeom prst="rect">
             <a:avLst/>
@@ -4731,84 +4849,6 @@
               </a:lnSpc>
             </a:pPr>
             <a:r>
-              <a:rPr sz="1300" b="1" spc="150">
-                <a:solidFill>
-                  <a:srgbClr val="EB0029"/>
-                </a:solidFill>
-                <a:latin typeface="Arial"/>
-              </a:rPr>
-              <a:t>CONCLUSÕES</a:t>
-            </a:r>
-          </a:p>
-        </p:txBody>
-      </p:sp>
-      <p:sp>
-        <p:nvSpPr>
-          <p:cNvPr id="6" name="TextBox 5"/>
-          <p:cNvSpPr txBox="1"/>
-          <p:nvPr/>
-        </p:nvSpPr>
-        <p:spPr>
-          <a:xfrm>
-            <a:off x="685800" y="868680"/>
-            <a:ext cx="10607040" cy="1188720"/>
-          </a:xfrm>
-          <a:prstGeom prst="rect">
-            <a:avLst/>
-          </a:prstGeom>
-          <a:noFill/>
-        </p:spPr>
-        <p:txBody>
-          <a:bodyPr wrap="square" anchor="t" lIns="0" rIns="0" tIns="0" bIns="0">
-            <a:spAutoFit/>
-          </a:bodyPr>
-          <a:lstStyle/>
-          <a:p>
-            <a:pPr algn="l">
-              <a:lnSpc>
-                <a:spcPct val="102000"/>
-              </a:lnSpc>
-            </a:pPr>
-            <a:r>
-              <a:rPr sz="2900" b="1">
-                <a:solidFill>
-                  <a:srgbClr val="1A1A1A"/>
-                </a:solidFill>
-                <a:latin typeface="Arial"/>
-              </a:rPr>
-              <a:t>Funcionou, e mostrou exatamente onde melhorar</a:t>
-            </a:r>
-          </a:p>
-        </p:txBody>
-      </p:sp>
-      <p:sp>
-        <p:nvSpPr>
-          <p:cNvPr id="7" name="TextBox 6"/>
-          <p:cNvSpPr txBox="1"/>
-          <p:nvPr/>
-        </p:nvSpPr>
-        <p:spPr>
-          <a:xfrm>
-            <a:off x="685800" y="6355080"/>
-            <a:ext cx="2743200" cy="320040"/>
-          </a:xfrm>
-          <a:prstGeom prst="rect">
-            <a:avLst/>
-          </a:prstGeom>
-          <a:noFill/>
-        </p:spPr>
-        <p:txBody>
-          <a:bodyPr wrap="square" anchor="t" lIns="0" rIns="0" tIns="0" bIns="0">
-            <a:spAutoFit/>
-          </a:bodyPr>
-          <a:lstStyle/>
-          <a:p>
-            <a:pPr algn="l">
-              <a:lnSpc>
-                <a:spcPct val="100000"/>
-              </a:lnSpc>
-            </a:pPr>
-            <a:r>
               <a:rPr sz="950" b="1" spc="80">
                 <a:solidFill>
                   <a:srgbClr val="6E6E6E"/>
@@ -4867,8 +4907,93 @@
         </p:nvSpPr>
         <p:spPr>
           <a:xfrm>
-            <a:off x="685800" y="2103120"/>
-            <a:ext cx="5257800" cy="3703320"/>
+            <a:off x="685800" y="1783080"/>
+            <a:ext cx="10817352" cy="868680"/>
+          </a:xfrm>
+          <a:prstGeom prst="roundRect">
+            <a:avLst>
+              <a:gd name="adj" fmla="val 6000"/>
+            </a:avLst>
+          </a:prstGeom>
+          <a:solidFill>
+            <a:srgbClr val="FCE9EB"/>
+          </a:solidFill>
+          <a:ln>
+            <a:noFill/>
+          </a:ln>
+          <a:effectLst/>
+        </p:spPr>
+        <p:style>
+          <a:lnRef idx="1">
+            <a:schemeClr val="accent1"/>
+          </a:lnRef>
+          <a:fillRef idx="3">
+            <a:schemeClr val="accent1"/>
+          </a:fillRef>
+          <a:effectRef idx="2">
+            <a:schemeClr val="accent1"/>
+          </a:effectRef>
+          <a:fontRef idx="minor">
+            <a:schemeClr val="lt1"/>
+          </a:fontRef>
+        </p:style>
+        <p:txBody>
+          <a:bodyPr rtlCol="0" anchor="ctr"/>
+          <a:lstStyle/>
+          <a:p>
+            <a:pPr algn="ctr"/>
+          </a:p>
+        </p:txBody>
+      </p:sp>
+      <p:sp>
+        <p:nvSpPr>
+          <p:cNvPr id="10" name="TextBox 9"/>
+          <p:cNvSpPr txBox="1"/>
+          <p:nvPr/>
+        </p:nvSpPr>
+        <p:spPr>
+          <a:xfrm>
+            <a:off x="960120" y="1783080"/>
+            <a:ext cx="10287000" cy="868680"/>
+          </a:xfrm>
+          <a:prstGeom prst="rect">
+            <a:avLst/>
+          </a:prstGeom>
+          <a:noFill/>
+        </p:spPr>
+        <p:txBody>
+          <a:bodyPr wrap="square" anchor="ctr" lIns="0" rIns="0" tIns="0" bIns="0">
+            <a:spAutoFit/>
+          </a:bodyPr>
+          <a:lstStyle/>
+          <a:p>
+            <a:pPr algn="l">
+              <a:lnSpc>
+                <a:spcPct val="120000"/>
+              </a:lnSpc>
+            </a:pPr>
+            <a:r>
+              <a:rPr sz="1350" b="1">
+                <a:solidFill>
+                  <a:srgbClr val="B50020"/>
+                </a:solidFill>
+                <a:latin typeface="Arial"/>
+              </a:rPr>
+              <a:t>A informalidade não é um detalhe estatístico: é quase metade do mercado de trabalho brasileiro, distribuída de forma desigual entre região, setor e cor. Foi esse padrão que motivou todo o projeto.</a:t>
+            </a:r>
+          </a:p>
+        </p:txBody>
+      </p:sp>
+      <p:sp>
+        <p:nvSpPr>
+          <p:cNvPr id="11" name="Rounded Rectangle 10"/>
+          <p:cNvSpPr/>
+          <p:nvPr/>
+        </p:nvSpPr>
+        <p:spPr>
+          <a:xfrm>
+            <a:off x="685800" y="2880360"/>
+            <a:ext cx="5257800" cy="3017520"/>
           </a:xfrm>
           <a:prstGeom prst="roundRect">
             <a:avLst>
@@ -4907,13 +5032,13 @@
       </p:sp>
       <p:sp>
         <p:nvSpPr>
-          <p:cNvPr id="10" name="TextBox 9"/>
+          <p:cNvPr id="12" name="TextBox 11"/>
           <p:cNvSpPr txBox="1"/>
           <p:nvPr/>
         </p:nvSpPr>
         <p:spPr>
           <a:xfrm>
-            <a:off x="960120" y="2331720"/>
+            <a:off x="960120" y="3108960"/>
             <a:ext cx="4754880" cy="457200"/>
           </a:xfrm>
           <a:prstGeom prst="rect">
@@ -4946,14 +5071,14 @@
       </p:sp>
       <p:sp>
         <p:nvSpPr>
-          <p:cNvPr id="11" name="TextBox 10"/>
+          <p:cNvPr id="13" name="TextBox 12"/>
           <p:cNvSpPr txBox="1"/>
           <p:nvPr/>
         </p:nvSpPr>
         <p:spPr>
           <a:xfrm>
-            <a:off x="960120" y="2834640"/>
-            <a:ext cx="4709160" cy="2834640"/>
+            <a:off x="960120" y="3566160"/>
+            <a:ext cx="4709160" cy="2194560"/>
           </a:xfrm>
           <a:prstGeom prst="rect">
             <a:avLst/>
@@ -4968,27 +5093,27 @@
           <a:p>
             <a:pPr algn="l">
               <a:lnSpc>
-                <a:spcPct val="135000"/>
+                <a:spcPct val="130000"/>
               </a:lnSpc>
             </a:pPr>
             <a:r>
-              <a:rPr sz="1300" b="0">
+              <a:rPr sz="1250" b="0">
                 <a:solidFill>
                   <a:srgbClr val="1A1A1A"/>
                 </a:solidFill>
                 <a:latin typeface="Arial"/>
               </a:rPr>
-              <a:t>• Pipeline reprodutível ponta a ponta, com validação em cada camada (0 linhas perdidas Bronze → Silver)</a:t>
+              <a:t>• Pipeline reprodutível ponta a ponta, do dado bruto do IBGE até uma predição interpretável</a:t>
             </a:r>
           </a:p>
           <a:p>
             <a:pPr algn="l">
               <a:lnSpc>
-                <a:spcPct val="135000"/>
+                <a:spcPct val="130000"/>
               </a:lnSpc>
             </a:pPr>
             <a:r>
-              <a:rPr sz="1300" b="0">
+              <a:rPr sz="1250" b="0">
                 <a:solidFill>
                   <a:srgbClr val="1A1A1A"/>
                 </a:solidFill>
@@ -5000,11 +5125,11 @@
           <a:p>
             <a:pPr algn="l">
               <a:lnSpc>
-                <a:spcPct val="135000"/>
+                <a:spcPct val="130000"/>
               </a:lnSpc>
             </a:pPr>
             <a:r>
-              <a:rPr sz="1300" b="0">
+              <a:rPr sz="1250" b="0">
                 <a:solidFill>
                   <a:srgbClr val="1A1A1A"/>
                 </a:solidFill>
@@ -5017,14 +5142,14 @@
       </p:sp>
       <p:sp>
         <p:nvSpPr>
-          <p:cNvPr id="12" name="Rounded Rectangle 11"/>
+          <p:cNvPr id="14" name="Rounded Rectangle 13"/>
           <p:cNvSpPr/>
           <p:nvPr/>
         </p:nvSpPr>
         <p:spPr>
           <a:xfrm>
-            <a:off x="6263640" y="2103120"/>
-            <a:ext cx="5257800" cy="3703320"/>
+            <a:off x="6263640" y="2880360"/>
+            <a:ext cx="5257800" cy="3017520"/>
           </a:xfrm>
           <a:prstGeom prst="roundRect">
             <a:avLst>
@@ -5063,13 +5188,13 @@
       </p:sp>
       <p:sp>
         <p:nvSpPr>
-          <p:cNvPr id="13" name="TextBox 12"/>
+          <p:cNvPr id="15" name="TextBox 14"/>
           <p:cNvSpPr txBox="1"/>
           <p:nvPr/>
         </p:nvSpPr>
         <p:spPr>
           <a:xfrm>
-            <a:off x="6537960" y="2331720"/>
+            <a:off x="6537960" y="3108960"/>
             <a:ext cx="4754880" cy="457200"/>
           </a:xfrm>
           <a:prstGeom prst="rect">
@@ -5102,14 +5227,14 @@
       </p:sp>
       <p:sp>
         <p:nvSpPr>
-          <p:cNvPr id="14" name="TextBox 13"/>
+          <p:cNvPr id="16" name="TextBox 15"/>
           <p:cNvSpPr txBox="1"/>
           <p:nvPr/>
         </p:nvSpPr>
         <p:spPr>
           <a:xfrm>
-            <a:off x="6537960" y="2834640"/>
-            <a:ext cx="4709160" cy="2834640"/>
+            <a:off x="6537960" y="3566160"/>
+            <a:ext cx="4709160" cy="2194560"/>
           </a:xfrm>
           <a:prstGeom prst="rect">
             <a:avLst/>
@@ -5124,11 +5249,11 @@
           <a:p>
             <a:pPr algn="l">
               <a:lnSpc>
-                <a:spcPct val="135000"/>
+                <a:spcPct val="130000"/>
               </a:lnSpc>
             </a:pPr>
             <a:r>
-              <a:rPr sz="1300" b="0">
+              <a:rPr sz="1250" b="0">
                 <a:solidFill>
                   <a:srgbClr val="1A1A1A"/>
                 </a:solidFill>
@@ -5140,27 +5265,27 @@
           <a:p>
             <a:pPr algn="l">
               <a:lnSpc>
-                <a:spcPct val="135000"/>
+                <a:spcPct val="130000"/>
               </a:lnSpc>
             </a:pPr>
             <a:r>
-              <a:rPr sz="1300" b="0">
+              <a:rPr sz="1250" b="0">
                 <a:solidFill>
                   <a:srgbClr val="1A1A1A"/>
                 </a:solidFill>
                 <a:latin typeface="Arial"/>
               </a:rPr>
-              <a:t>• Usar o peso amostral da PNAD (V1028) na avaliação, hoje só o próprio desenho complexo em aberto</a:t>
+              <a:t>• Usar o peso amostral da PNAD (V1028) na avaliação, hoje em aberto</a:t>
             </a:r>
           </a:p>
           <a:p>
             <a:pPr algn="l">
               <a:lnSpc>
-                <a:spcPct val="135000"/>
+                <a:spcPct val="130000"/>
               </a:lnSpc>
             </a:pPr>
             <a:r>
-              <a:rPr sz="1300" b="0">
+              <a:rPr sz="1250" b="0">
                 <a:solidFill>
                   <a:srgbClr val="1A1A1A"/>
                 </a:solidFill>
@@ -5249,8 +5374,8 @@
         </p:blipFill>
         <p:spPr>
           <a:xfrm>
-            <a:off x="685800" y="457200"/>
-            <a:ext cx="1325880" cy="530502"/>
+            <a:off x="685800" y="548640"/>
+            <a:ext cx="1463040" cy="585381"/>
           </a:xfrm>
           <a:prstGeom prst="rect">
             <a:avLst/>
@@ -5265,8 +5390,8 @@
         </p:nvSpPr>
         <p:spPr>
           <a:xfrm>
-            <a:off x="685800" y="1234440"/>
-            <a:ext cx="8229600" cy="365760"/>
+            <a:off x="685800" y="2468880"/>
+            <a:ext cx="9144000" cy="1188720"/>
           </a:xfrm>
           <a:prstGeom prst="rect">
             <a:avLst/>
@@ -5285,13 +5410,13 @@
               </a:lnSpc>
             </a:pPr>
             <a:r>
-              <a:rPr sz="1300" b="1" spc="150">
-                <a:solidFill>
-                  <a:srgbClr val="FFB3C0"/>
+              <a:rPr sz="5800" b="1">
+                <a:solidFill>
+                  <a:srgbClr val="FFFFFF"/>
                 </a:solidFill>
                 <a:latin typeface="Arial"/>
               </a:rPr>
-              <a:t>CONCLUSÃO GERAL</a:t>
+              <a:t>Obrigado.</a:t>
             </a:r>
           </a:p>
         </p:txBody>
@@ -5304,8 +5429,8 @@
         </p:nvSpPr>
         <p:spPr>
           <a:xfrm>
-            <a:off x="685800" y="1600200"/>
-            <a:ext cx="10607040" cy="777240"/>
+            <a:off x="685800" y="3520440"/>
+            <a:ext cx="8229600" cy="640080"/>
           </a:xfrm>
           <a:prstGeom prst="rect">
             <a:avLst/>
@@ -5320,69 +5445,30 @@
           <a:p>
             <a:pPr algn="l">
               <a:lnSpc>
-                <a:spcPct val="120000"/>
+                <a:spcPct val="100000"/>
               </a:lnSpc>
             </a:pPr>
             <a:r>
-              <a:rPr sz="1650" b="1">
+              <a:rPr sz="2200" b="0">
                 <a:solidFill>
                   <a:srgbClr val="FFFFFF"/>
                 </a:solidFill>
                 <a:latin typeface="Arial"/>
               </a:rPr>
-              <a:t>A informalidade não é um detalhe estatístico. É quase metade do mercado de trabalho brasileiro, distribuída de forma desigual entre região, setor e cor.</a:t>
-            </a:r>
-          </a:p>
-        </p:txBody>
-      </p:sp>
-      <p:sp>
-        <p:nvSpPr>
-          <p:cNvPr id="6" name="TextBox 5"/>
-          <p:cNvSpPr txBox="1"/>
-          <p:nvPr/>
-        </p:nvSpPr>
-        <p:spPr>
-          <a:xfrm>
-            <a:off x="685800" y="2514600"/>
-            <a:ext cx="10607040" cy="822960"/>
-          </a:xfrm>
-          <a:prstGeom prst="rect">
-            <a:avLst/>
-          </a:prstGeom>
-          <a:noFill/>
-        </p:spPr>
-        <p:txBody>
-          <a:bodyPr wrap="square" anchor="t" lIns="0" rIns="0" tIns="0" bIns="0">
-            <a:spAutoFit/>
-          </a:bodyPr>
-          <a:lstStyle/>
-          <a:p>
-            <a:pPr algn="l">
-              <a:lnSpc>
-                <a:spcPct val="120000"/>
-              </a:lnSpc>
-            </a:pPr>
-            <a:r>
-              <a:rPr sz="1650" b="1">
-                <a:solidFill>
-                  <a:srgbClr val="FFFFFF"/>
-                </a:solidFill>
-                <a:latin typeface="Arial"/>
-              </a:rPr>
-              <a:t>Este projeto entrega mais que um modelo: um pipeline completo, do dado bruto do IBGE até uma predição interpretável, reprodutível do início ao fim.</a:t>
-            </a:r>
-          </a:p>
-        </p:txBody>
-      </p:sp>
-      <p:sp>
-        <p:nvSpPr>
-          <p:cNvPr id="7" name="Rectangle 6"/>
+              <a:t>Perguntas?</a:t>
+            </a:r>
+          </a:p>
+        </p:txBody>
+      </p:sp>
+      <p:sp>
+        <p:nvSpPr>
+          <p:cNvPr id="6" name="Rectangle 5"/>
           <p:cNvSpPr/>
           <p:nvPr/>
         </p:nvSpPr>
         <p:spPr>
           <a:xfrm>
-            <a:off x="685800" y="3611880"/>
+            <a:off x="685800" y="5029200"/>
             <a:ext cx="3840480" cy="13970"/>
           </a:xfrm>
           <a:prstGeom prst="rect">
@@ -5420,14 +5506,14 @@
       </p:sp>
       <p:sp>
         <p:nvSpPr>
-          <p:cNvPr id="8" name="TextBox 7"/>
+          <p:cNvPr id="7" name="TextBox 6"/>
           <p:cNvSpPr txBox="1"/>
           <p:nvPr/>
         </p:nvSpPr>
         <p:spPr>
           <a:xfrm>
-            <a:off x="685800" y="3840480"/>
-            <a:ext cx="9144000" cy="914400"/>
+            <a:off x="685800" y="5212080"/>
+            <a:ext cx="8229600" cy="1097280"/>
           </a:xfrm>
           <a:prstGeom prst="rect">
             <a:avLst/>
@@ -5442,89 +5528,11 @@
           <a:p>
             <a:pPr algn="l">
               <a:lnSpc>
-                <a:spcPct val="100000"/>
+                <a:spcPct val="135000"/>
               </a:lnSpc>
             </a:pPr>
             <a:r>
-              <a:rPr sz="4400" b="1">
-                <a:solidFill>
-                  <a:srgbClr val="FFFFFF"/>
-                </a:solidFill>
-                <a:latin typeface="Arial"/>
-              </a:rPr>
-              <a:t>Obrigado.</a:t>
-            </a:r>
-          </a:p>
-        </p:txBody>
-      </p:sp>
-      <p:sp>
-        <p:nvSpPr>
-          <p:cNvPr id="9" name="TextBox 8"/>
-          <p:cNvSpPr txBox="1"/>
-          <p:nvPr/>
-        </p:nvSpPr>
-        <p:spPr>
-          <a:xfrm>
-            <a:off x="685800" y="4617720"/>
-            <a:ext cx="8229600" cy="548640"/>
-          </a:xfrm>
-          <a:prstGeom prst="rect">
-            <a:avLst/>
-          </a:prstGeom>
-          <a:noFill/>
-        </p:spPr>
-        <p:txBody>
-          <a:bodyPr wrap="square" anchor="t" lIns="0" rIns="0" tIns="0" bIns="0">
-            <a:spAutoFit/>
-          </a:bodyPr>
-          <a:lstStyle/>
-          <a:p>
-            <a:pPr algn="l">
-              <a:lnSpc>
-                <a:spcPct val="100000"/>
-              </a:lnSpc>
-            </a:pPr>
-            <a:r>
-              <a:rPr sz="2000" b="0">
-                <a:solidFill>
-                  <a:srgbClr val="FFFFFF"/>
-                </a:solidFill>
-                <a:latin typeface="Arial"/>
-              </a:rPr>
-              <a:t>Perguntas?</a:t>
-            </a:r>
-          </a:p>
-        </p:txBody>
-      </p:sp>
-      <p:sp>
-        <p:nvSpPr>
-          <p:cNvPr id="10" name="TextBox 9"/>
-          <p:cNvSpPr txBox="1"/>
-          <p:nvPr/>
-        </p:nvSpPr>
-        <p:spPr>
-          <a:xfrm>
-            <a:off x="685800" y="5577840"/>
-            <a:ext cx="8229600" cy="914400"/>
-          </a:xfrm>
-          <a:prstGeom prst="rect">
-            <a:avLst/>
-          </a:prstGeom>
-          <a:noFill/>
-        </p:spPr>
-        <p:txBody>
-          <a:bodyPr wrap="square" anchor="t" lIns="0" rIns="0" tIns="0" bIns="0">
-            <a:spAutoFit/>
-          </a:bodyPr>
-          <a:lstStyle/>
-          <a:p>
-            <a:pPr algn="l">
-              <a:lnSpc>
-                <a:spcPct val="130000"/>
-              </a:lnSpc>
-            </a:pPr>
-            <a:r>
-              <a:rPr sz="1250" b="0">
+              <a:rPr sz="1350" b="0">
                 <a:solidFill>
                   <a:srgbClr val="FFFFFF"/>
                 </a:solidFill>
@@ -5536,11 +5544,11 @@
           <a:p>
             <a:pPr algn="l">
               <a:lnSpc>
-                <a:spcPct val="130000"/>
+                <a:spcPct val="135000"/>
               </a:lnSpc>
             </a:pPr>
             <a:r>
-              <a:rPr sz="1250" b="0">
+              <a:rPr sz="1350" b="0">
                 <a:solidFill>
                   <a:srgbClr val="FFFFFF"/>
                 </a:solidFill>
@@ -5552,11 +5560,11 @@
           <a:p>
             <a:pPr algn="l">
               <a:lnSpc>
-                <a:spcPct val="130000"/>
+                <a:spcPct val="135000"/>
               </a:lnSpc>
             </a:pPr>
             <a:r>
-              <a:rPr sz="1250" b="0">
+              <a:rPr sz="1350" b="0">
                 <a:solidFill>
                   <a:srgbClr val="FFFFFF"/>
                 </a:solidFill>
@@ -5569,13 +5577,13 @@
       </p:sp>
       <p:sp>
         <p:nvSpPr>
-          <p:cNvPr id="11" name="TextBox 10"/>
+          <p:cNvPr id="8" name="TextBox 7"/>
           <p:cNvSpPr txBox="1"/>
           <p:nvPr/>
         </p:nvSpPr>
         <p:spPr>
           <a:xfrm>
-            <a:off x="8168335" y="6355080"/>
+            <a:off x="8168335" y="6309360"/>
             <a:ext cx="3474720" cy="320040"/>
           </a:xfrm>
           <a:prstGeom prst="rect">
@@ -10513,6 +10521,852 @@
 </p:sld>
 </file>
 
+<file path=ppt/slides/slide17.xml><?xml version="1.0" encoding="utf-8"?>
+<p:sld xmlns:a="http://schemas.openxmlformats.org/drawingml/2006/main" xmlns:p="http://schemas.openxmlformats.org/presentationml/2006/main" xmlns:r="http://schemas.openxmlformats.org/officeDocument/2006/relationships" show="0">
+  <p:cSld>
+    <p:spTree>
+      <p:nvGrpSpPr>
+        <p:cNvPr id="1" name=""/>
+        <p:cNvGrpSpPr/>
+        <p:nvPr/>
+      </p:nvGrpSpPr>
+      <p:grpSpPr/>
+      <p:sp>
+        <p:nvSpPr>
+          <p:cNvPr id="2" name="Rectangle 1"/>
+          <p:cNvSpPr/>
+          <p:nvPr/>
+        </p:nvSpPr>
+        <p:spPr>
+          <a:xfrm>
+            <a:off x="0" y="0"/>
+            <a:ext cx="12191695" cy="6858000"/>
+          </a:xfrm>
+          <a:prstGeom prst="rect">
+            <a:avLst/>
+          </a:prstGeom>
+          <a:solidFill>
+            <a:srgbClr val="FFFFFF"/>
+          </a:solidFill>
+          <a:ln>
+            <a:noFill/>
+          </a:ln>
+          <a:effectLst/>
+        </p:spPr>
+        <p:style>
+          <a:lnRef idx="1">
+            <a:schemeClr val="accent1"/>
+          </a:lnRef>
+          <a:fillRef idx="3">
+            <a:schemeClr val="accent1"/>
+          </a:fillRef>
+          <a:effectRef idx="2">
+            <a:schemeClr val="accent1"/>
+          </a:effectRef>
+          <a:fontRef idx="minor">
+            <a:schemeClr val="lt1"/>
+          </a:fontRef>
+        </p:style>
+        <p:txBody>
+          <a:bodyPr rtlCol="0" anchor="ctr"/>
+          <a:lstStyle/>
+          <a:p>
+            <a:pPr algn="ctr"/>
+          </a:p>
+        </p:txBody>
+      </p:sp>
+      <p:sp>
+        <p:nvSpPr>
+          <p:cNvPr id="3" name="Rectangle 2"/>
+          <p:cNvSpPr/>
+          <p:nvPr/>
+        </p:nvSpPr>
+        <p:spPr>
+          <a:xfrm>
+            <a:off x="0" y="0"/>
+            <a:ext cx="128016" cy="6858000"/>
+          </a:xfrm>
+          <a:prstGeom prst="rect">
+            <a:avLst/>
+          </a:prstGeom>
+          <a:solidFill>
+            <a:srgbClr val="6E6E6E"/>
+          </a:solidFill>
+          <a:ln>
+            <a:noFill/>
+          </a:ln>
+          <a:effectLst/>
+        </p:spPr>
+        <p:style>
+          <a:lnRef idx="1">
+            <a:schemeClr val="accent1"/>
+          </a:lnRef>
+          <a:fillRef idx="3">
+            <a:schemeClr val="accent1"/>
+          </a:fillRef>
+          <a:effectRef idx="2">
+            <a:schemeClr val="accent1"/>
+          </a:effectRef>
+          <a:fontRef idx="minor">
+            <a:schemeClr val="lt1"/>
+          </a:fontRef>
+        </p:style>
+        <p:txBody>
+          <a:bodyPr rtlCol="0" anchor="ctr"/>
+          <a:lstStyle/>
+          <a:p>
+            <a:pPr algn="ctr"/>
+          </a:p>
+        </p:txBody>
+      </p:sp>
+      <p:pic>
+        <p:nvPicPr>
+          <p:cNvPr id="4" name="Picture 3" descr="MCK_horizontal_preto-01.png"/>
+          <p:cNvPicPr>
+            <a:picLocks noChangeAspect="1"/>
+          </p:cNvPicPr>
+          <p:nvPr/>
+        </p:nvPicPr>
+        <p:blipFill>
+          <a:blip r:embed="rId2"/>
+          <a:stretch>
+            <a:fillRect/>
+          </a:stretch>
+        </p:blipFill>
+        <p:spPr>
+          <a:xfrm>
+            <a:off x="10408615" y="457200"/>
+            <a:ext cx="1234440" cy="493915"/>
+          </a:xfrm>
+          <a:prstGeom prst="rect">
+            <a:avLst/>
+          </a:prstGeom>
+        </p:spPr>
+      </p:pic>
+      <p:sp>
+        <p:nvSpPr>
+          <p:cNvPr id="5" name="TextBox 4"/>
+          <p:cNvSpPr txBox="1"/>
+          <p:nvPr/>
+        </p:nvSpPr>
+        <p:spPr>
+          <a:xfrm>
+            <a:off x="685800" y="502920"/>
+            <a:ext cx="8229600" cy="365760"/>
+          </a:xfrm>
+          <a:prstGeom prst="rect">
+            <a:avLst/>
+          </a:prstGeom>
+          <a:noFill/>
+        </p:spPr>
+        <p:txBody>
+          <a:bodyPr wrap="square" anchor="t" lIns="0" rIns="0" tIns="0" bIns="0">
+            <a:spAutoFit/>
+          </a:bodyPr>
+          <a:lstStyle/>
+          <a:p>
+            <a:pPr algn="l">
+              <a:lnSpc>
+                <a:spcPct val="100000"/>
+              </a:lnSpc>
+            </a:pPr>
+            <a:r>
+              <a:rPr sz="1300" b="1" spc="150">
+                <a:solidFill>
+                  <a:srgbClr val="6E6E6E"/>
+                </a:solidFill>
+                <a:latin typeface="Arial"/>
+              </a:rPr>
+              <a:t>MATERIAL DE APOIO · ANÁLISE EXPLORATÓRIA</a:t>
+            </a:r>
+          </a:p>
+        </p:txBody>
+      </p:sp>
+      <p:sp>
+        <p:nvSpPr>
+          <p:cNvPr id="6" name="TextBox 5"/>
+          <p:cNvSpPr txBox="1"/>
+          <p:nvPr/>
+        </p:nvSpPr>
+        <p:spPr>
+          <a:xfrm>
+            <a:off x="685800" y="868680"/>
+            <a:ext cx="10607040" cy="1188720"/>
+          </a:xfrm>
+          <a:prstGeom prst="rect">
+            <a:avLst/>
+          </a:prstGeom>
+          <a:noFill/>
+        </p:spPr>
+        <p:txBody>
+          <a:bodyPr wrap="square" anchor="t" lIns="0" rIns="0" tIns="0" bIns="0">
+            <a:spAutoFit/>
+          </a:bodyPr>
+          <a:lstStyle/>
+          <a:p>
+            <a:pPr algn="l">
+              <a:lnSpc>
+                <a:spcPct val="102000"/>
+              </a:lnSpc>
+            </a:pPr>
+            <a:r>
+              <a:rPr sz="2700" b="1">
+                <a:solidFill>
+                  <a:srgbClr val="1A1A1A"/>
+                </a:solidFill>
+                <a:latin typeface="Arial"/>
+              </a:rPr>
+              <a:t>Sem instrução e agropecuária concentram a informalidade</a:t>
+            </a:r>
+          </a:p>
+        </p:txBody>
+      </p:sp>
+      <p:sp>
+        <p:nvSpPr>
+          <p:cNvPr id="7" name="TextBox 6"/>
+          <p:cNvSpPr txBox="1"/>
+          <p:nvPr/>
+        </p:nvSpPr>
+        <p:spPr>
+          <a:xfrm>
+            <a:off x="685800" y="6355080"/>
+            <a:ext cx="5486400" cy="320040"/>
+          </a:xfrm>
+          <a:prstGeom prst="rect">
+            <a:avLst/>
+          </a:prstGeom>
+          <a:noFill/>
+        </p:spPr>
+        <p:txBody>
+          <a:bodyPr wrap="square" anchor="t" lIns="0" rIns="0" tIns="0" bIns="0">
+            <a:spAutoFit/>
+          </a:bodyPr>
+          <a:lstStyle/>
+          <a:p>
+            <a:pPr algn="l">
+              <a:lnSpc>
+                <a:spcPct val="100000"/>
+              </a:lnSpc>
+            </a:pPr>
+            <a:r>
+              <a:rPr sz="950" b="0">
+                <a:solidFill>
+                  <a:srgbClr val="6E6E6E"/>
+                </a:solidFill>
+                <a:latin typeface="Arial"/>
+              </a:rPr>
+              <a:t>InformalidadeBR: apoio para perguntas (fora dos 10 min)</a:t>
+            </a:r>
+          </a:p>
+        </p:txBody>
+      </p:sp>
+      <p:sp>
+        <p:nvSpPr>
+          <p:cNvPr id="8" name="TextBox 7"/>
+          <p:cNvSpPr txBox="1"/>
+          <p:nvPr/>
+        </p:nvSpPr>
+        <p:spPr>
+          <a:xfrm>
+            <a:off x="685800" y="1463040"/>
+            <a:ext cx="10817352" cy="292608"/>
+          </a:xfrm>
+          <a:prstGeom prst="rect">
+            <a:avLst/>
+          </a:prstGeom>
+          <a:noFill/>
+        </p:spPr>
+        <p:txBody>
+          <a:bodyPr wrap="square" anchor="t" lIns="0" rIns="0" tIns="0" bIns="0">
+            <a:spAutoFit/>
+          </a:bodyPr>
+          <a:lstStyle/>
+          <a:p>
+            <a:pPr algn="l">
+              <a:lnSpc>
+                <a:spcPct val="115000"/>
+              </a:lnSpc>
+            </a:pPr>
+            <a:r>
+              <a:rPr sz="1050" b="0">
+                <a:solidFill>
+                  <a:srgbClr val="6E6E6E"/>
+                </a:solidFill>
+                <a:latin typeface="Arial"/>
+              </a:rPr>
+              <a:t>Cada barra mostra quantas vezes a categoria é mais comum num grupo do que no outro (escala logarítmica). Cor só nos 3 casos mais extremos — o resto fica em cinza, perto do equilíbrio (linha central = 1x).</a:t>
+            </a:r>
+          </a:p>
+        </p:txBody>
+      </p:sp>
+      <p:pic>
+        <p:nvPicPr>
+          <p:cNvPr id="9" name="Picture 8" descr="fig_eda_indice.png"/>
+          <p:cNvPicPr>
+            <a:picLocks noChangeAspect="1"/>
+          </p:cNvPicPr>
+          <p:nvPr/>
+        </p:nvPicPr>
+        <p:blipFill>
+          <a:blip r:embed="rId3"/>
+          <a:stretch>
+            <a:fillRect/>
+          </a:stretch>
+        </p:blipFill>
+        <p:spPr>
+          <a:xfrm>
+            <a:off x="685800" y="1828800"/>
+            <a:ext cx="6263640" cy="4375364"/>
+          </a:xfrm>
+          <a:prstGeom prst="rect">
+            <a:avLst/>
+          </a:prstGeom>
+        </p:spPr>
+      </p:pic>
+      <p:sp>
+        <p:nvSpPr>
+          <p:cNvPr id="10" name="Rounded Rectangle 9"/>
+          <p:cNvSpPr/>
+          <p:nvPr/>
+        </p:nvSpPr>
+        <p:spPr>
+          <a:xfrm>
+            <a:off x="7269480" y="1783080"/>
+            <a:ext cx="4233672" cy="1280160"/>
+          </a:xfrm>
+          <a:prstGeom prst="roundRect">
+            <a:avLst>
+              <a:gd name="adj" fmla="val 6000"/>
+            </a:avLst>
+          </a:prstGeom>
+          <a:solidFill>
+            <a:srgbClr val="FCE9EB"/>
+          </a:solidFill>
+          <a:ln>
+            <a:noFill/>
+          </a:ln>
+          <a:effectLst/>
+        </p:spPr>
+        <p:style>
+          <a:lnRef idx="1">
+            <a:schemeClr val="accent1"/>
+          </a:lnRef>
+          <a:fillRef idx="3">
+            <a:schemeClr val="accent1"/>
+          </a:fillRef>
+          <a:effectRef idx="2">
+            <a:schemeClr val="accent1"/>
+          </a:effectRef>
+          <a:fontRef idx="minor">
+            <a:schemeClr val="lt1"/>
+          </a:fontRef>
+        </p:style>
+        <p:txBody>
+          <a:bodyPr rtlCol="0" anchor="ctr"/>
+          <a:lstStyle/>
+          <a:p>
+            <a:pPr algn="ctr"/>
+          </a:p>
+        </p:txBody>
+      </p:sp>
+      <p:sp>
+        <p:nvSpPr>
+          <p:cNvPr id="11" name="TextBox 10"/>
+          <p:cNvSpPr txBox="1"/>
+          <p:nvPr/>
+        </p:nvSpPr>
+        <p:spPr>
+          <a:xfrm>
+            <a:off x="7498080" y="1883664"/>
+            <a:ext cx="1828800" cy="640080"/>
+          </a:xfrm>
+          <a:prstGeom prst="rect">
+            <a:avLst/>
+          </a:prstGeom>
+          <a:noFill/>
+        </p:spPr>
+        <p:txBody>
+          <a:bodyPr wrap="square" anchor="t" lIns="0" rIns="0" tIns="0" bIns="0">
+            <a:spAutoFit/>
+          </a:bodyPr>
+          <a:lstStyle/>
+          <a:p>
+            <a:pPr algn="l">
+              <a:lnSpc>
+                <a:spcPct val="100000"/>
+              </a:lnSpc>
+            </a:pPr>
+            <a:r>
+              <a:rPr sz="3800" b="1">
+                <a:solidFill>
+                  <a:srgbClr val="EB0029"/>
+                </a:solidFill>
+                <a:latin typeface="Arial"/>
+              </a:rPr>
+              <a:t>5,0x</a:t>
+            </a:r>
+          </a:p>
+        </p:txBody>
+      </p:sp>
+      <p:sp>
+        <p:nvSpPr>
+          <p:cNvPr id="12" name="TextBox 11"/>
+          <p:cNvSpPr txBox="1"/>
+          <p:nvPr/>
+        </p:nvSpPr>
+        <p:spPr>
+          <a:xfrm>
+            <a:off x="7498080" y="2514600"/>
+            <a:ext cx="3776472" cy="502920"/>
+          </a:xfrm>
+          <a:prstGeom prst="rect">
+            <a:avLst/>
+          </a:prstGeom>
+          <a:noFill/>
+        </p:spPr>
+        <p:txBody>
+          <a:bodyPr wrap="square" anchor="t" lIns="0" rIns="0" tIns="0" bIns="0">
+            <a:spAutoFit/>
+          </a:bodyPr>
+          <a:lstStyle/>
+          <a:p>
+            <a:pPr algn="l">
+              <a:lnSpc>
+                <a:spcPct val="115000"/>
+              </a:lnSpc>
+            </a:pPr>
+            <a:r>
+              <a:rPr sz="1050" b="0">
+                <a:solidFill>
+                  <a:srgbClr val="1A1A1A"/>
+                </a:solidFill>
+                <a:latin typeface="Arial"/>
+              </a:rPr>
+              <a:t>mais informalidade entre quem não tem instrução (5% dos informais, 1% dos formais)</a:t>
+            </a:r>
+          </a:p>
+        </p:txBody>
+      </p:sp>
+      <p:sp>
+        <p:nvSpPr>
+          <p:cNvPr id="13" name="Rounded Rectangle 12"/>
+          <p:cNvSpPr/>
+          <p:nvPr/>
+        </p:nvSpPr>
+        <p:spPr>
+          <a:xfrm>
+            <a:off x="7269480" y="3200400"/>
+            <a:ext cx="4233672" cy="1280160"/>
+          </a:xfrm>
+          <a:prstGeom prst="roundRect">
+            <a:avLst>
+              <a:gd name="adj" fmla="val 6000"/>
+            </a:avLst>
+          </a:prstGeom>
+          <a:solidFill>
+            <a:srgbClr val="FCE9EB"/>
+          </a:solidFill>
+          <a:ln>
+            <a:noFill/>
+          </a:ln>
+          <a:effectLst/>
+        </p:spPr>
+        <p:style>
+          <a:lnRef idx="1">
+            <a:schemeClr val="accent1"/>
+          </a:lnRef>
+          <a:fillRef idx="3">
+            <a:schemeClr val="accent1"/>
+          </a:fillRef>
+          <a:effectRef idx="2">
+            <a:schemeClr val="accent1"/>
+          </a:effectRef>
+          <a:fontRef idx="minor">
+            <a:schemeClr val="lt1"/>
+          </a:fontRef>
+        </p:style>
+        <p:txBody>
+          <a:bodyPr rtlCol="0" anchor="ctr"/>
+          <a:lstStyle/>
+          <a:p>
+            <a:pPr algn="ctr"/>
+          </a:p>
+        </p:txBody>
+      </p:sp>
+      <p:sp>
+        <p:nvSpPr>
+          <p:cNvPr id="14" name="TextBox 13"/>
+          <p:cNvSpPr txBox="1"/>
+          <p:nvPr/>
+        </p:nvSpPr>
+        <p:spPr>
+          <a:xfrm>
+            <a:off x="7498080" y="3300984"/>
+            <a:ext cx="1828800" cy="640080"/>
+          </a:xfrm>
+          <a:prstGeom prst="rect">
+            <a:avLst/>
+          </a:prstGeom>
+          <a:noFill/>
+        </p:spPr>
+        <p:txBody>
+          <a:bodyPr wrap="square" anchor="t" lIns="0" rIns="0" tIns="0" bIns="0">
+            <a:spAutoFit/>
+          </a:bodyPr>
+          <a:lstStyle/>
+          <a:p>
+            <a:pPr algn="l">
+              <a:lnSpc>
+                <a:spcPct val="100000"/>
+              </a:lnSpc>
+            </a:pPr>
+            <a:r>
+              <a:rPr sz="3800" b="1">
+                <a:solidFill>
+                  <a:srgbClr val="EB0029"/>
+                </a:solidFill>
+                <a:latin typeface="Arial"/>
+              </a:rPr>
+              <a:t>4,0x</a:t>
+            </a:r>
+          </a:p>
+        </p:txBody>
+      </p:sp>
+      <p:sp>
+        <p:nvSpPr>
+          <p:cNvPr id="15" name="TextBox 14"/>
+          <p:cNvSpPr txBox="1"/>
+          <p:nvPr/>
+        </p:nvSpPr>
+        <p:spPr>
+          <a:xfrm>
+            <a:off x="7498080" y="3931920"/>
+            <a:ext cx="3776472" cy="502920"/>
+          </a:xfrm>
+          <a:prstGeom prst="rect">
+            <a:avLst/>
+          </a:prstGeom>
+          <a:noFill/>
+        </p:spPr>
+        <p:txBody>
+          <a:bodyPr wrap="square" anchor="t" lIns="0" rIns="0" tIns="0" bIns="0">
+            <a:spAutoFit/>
+          </a:bodyPr>
+          <a:lstStyle/>
+          <a:p>
+            <a:pPr algn="l">
+              <a:lnSpc>
+                <a:spcPct val="115000"/>
+              </a:lnSpc>
+            </a:pPr>
+            <a:r>
+              <a:rPr sz="1050" b="0">
+                <a:solidFill>
+                  <a:srgbClr val="1A1A1A"/>
+                </a:solidFill>
+                <a:latin typeface="Arial"/>
+              </a:rPr>
+              <a:t>mais informalidade na agropecuária, pesca e aquicultura (24% x 6% entre os formais)</a:t>
+            </a:r>
+          </a:p>
+        </p:txBody>
+      </p:sp>
+      <p:sp>
+        <p:nvSpPr>
+          <p:cNvPr id="16" name="Rounded Rectangle 15"/>
+          <p:cNvSpPr/>
+          <p:nvPr/>
+        </p:nvSpPr>
+        <p:spPr>
+          <a:xfrm>
+            <a:off x="7269480" y="4617720"/>
+            <a:ext cx="4233672" cy="1554480"/>
+          </a:xfrm>
+          <a:prstGeom prst="roundRect">
+            <a:avLst>
+              <a:gd name="adj" fmla="val 6000"/>
+            </a:avLst>
+          </a:prstGeom>
+          <a:solidFill>
+            <a:srgbClr val="FAF9F8"/>
+          </a:solidFill>
+          <a:ln>
+            <a:noFill/>
+          </a:ln>
+          <a:effectLst/>
+        </p:spPr>
+        <p:style>
+          <a:lnRef idx="1">
+            <a:schemeClr val="accent1"/>
+          </a:lnRef>
+          <a:fillRef idx="3">
+            <a:schemeClr val="accent1"/>
+          </a:fillRef>
+          <a:effectRef idx="2">
+            <a:schemeClr val="accent1"/>
+          </a:effectRef>
+          <a:fontRef idx="minor">
+            <a:schemeClr val="lt1"/>
+          </a:fontRef>
+        </p:style>
+        <p:txBody>
+          <a:bodyPr rtlCol="0" anchor="ctr"/>
+          <a:lstStyle/>
+          <a:p>
+            <a:pPr algn="ctr"/>
+          </a:p>
+        </p:txBody>
+      </p:sp>
+      <p:sp>
+        <p:nvSpPr>
+          <p:cNvPr id="17" name="TextBox 16"/>
+          <p:cNvSpPr txBox="1"/>
+          <p:nvPr/>
+        </p:nvSpPr>
+        <p:spPr>
+          <a:xfrm>
+            <a:off x="7498080" y="4709160"/>
+            <a:ext cx="3200400" cy="228600"/>
+          </a:xfrm>
+          <a:prstGeom prst="rect">
+            <a:avLst/>
+          </a:prstGeom>
+          <a:noFill/>
+        </p:spPr>
+        <p:txBody>
+          <a:bodyPr wrap="square" anchor="t" lIns="0" rIns="0" tIns="0" bIns="0">
+            <a:spAutoFit/>
+          </a:bodyPr>
+          <a:lstStyle/>
+          <a:p>
+            <a:pPr algn="l">
+              <a:lnSpc>
+                <a:spcPct val="100000"/>
+              </a:lnSpc>
+            </a:pPr>
+            <a:r>
+              <a:rPr sz="1000" b="1" spc="60">
+                <a:solidFill>
+                  <a:srgbClr val="6E6E6E"/>
+                </a:solidFill>
+                <a:latin typeface="Arial"/>
+              </a:rPr>
+              <a:t>RENDA MEDIANA</a:t>
+            </a:r>
+          </a:p>
+        </p:txBody>
+      </p:sp>
+      <p:pic>
+        <p:nvPicPr>
+          <p:cNvPr id="18" name="Picture 17" descr="fig_eda_renda.png"/>
+          <p:cNvPicPr>
+            <a:picLocks noChangeAspect="1"/>
+          </p:cNvPicPr>
+          <p:nvPr/>
+        </p:nvPicPr>
+        <p:blipFill>
+          <a:blip r:embed="rId4"/>
+          <a:stretch>
+            <a:fillRect/>
+          </a:stretch>
+        </p:blipFill>
+        <p:spPr>
+          <a:xfrm>
+            <a:off x="7498080" y="4956048"/>
+            <a:ext cx="1920240" cy="533400"/>
+          </a:xfrm>
+          <a:prstGeom prst="rect">
+            <a:avLst/>
+          </a:prstGeom>
+        </p:spPr>
+      </p:pic>
+      <p:sp>
+        <p:nvSpPr>
+          <p:cNvPr id="19" name="TextBox 18"/>
+          <p:cNvSpPr txBox="1"/>
+          <p:nvPr/>
+        </p:nvSpPr>
+        <p:spPr>
+          <a:xfrm>
+            <a:off x="7498080" y="5577840"/>
+            <a:ext cx="3776472" cy="502920"/>
+          </a:xfrm>
+          <a:prstGeom prst="rect">
+            <a:avLst/>
+          </a:prstGeom>
+          <a:noFill/>
+        </p:spPr>
+        <p:txBody>
+          <a:bodyPr wrap="square" anchor="t" lIns="0" rIns="0" tIns="0" bIns="0">
+            <a:spAutoFit/>
+          </a:bodyPr>
+          <a:lstStyle/>
+          <a:p>
+            <a:pPr algn="l">
+              <a:lnSpc>
+                <a:spcPct val="115000"/>
+              </a:lnSpc>
+            </a:pPr>
+            <a:r>
+              <a:rPr sz="1000" b="0">
+                <a:solidFill>
+                  <a:srgbClr val="1A1A1A"/>
+                </a:solidFill>
+                <a:latin typeface="Arial"/>
+              </a:rPr>
+              <a:t>Informal ganha 42% menos. Não entra no modelo: é consequência da informalidade, não causa.</a:t>
+            </a:r>
+          </a:p>
+        </p:txBody>
+      </p:sp>
+      <p:sp>
+        <p:nvSpPr>
+          <p:cNvPr id="20" name="Oval 19">
+            <a:hlinkClick action="ppaction://hlinkshowjump?jump=lastslideviewed"/>
+          </p:cNvPr>
+          <p:cNvSpPr/>
+          <p:nvPr/>
+        </p:nvSpPr>
+        <p:spPr>
+          <a:xfrm>
+            <a:off x="685800" y="73152"/>
+            <a:ext cx="402336" cy="402336"/>
+          </a:xfrm>
+          <a:prstGeom prst="ellipse">
+            <a:avLst/>
+          </a:prstGeom>
+          <a:solidFill>
+            <a:srgbClr val="FAF9F8"/>
+          </a:solidFill>
+          <a:ln w="12700">
+            <a:solidFill>
+              <a:srgbClr val="E7E7E7"/>
+            </a:solidFill>
+          </a:ln>
+          <a:effectLst/>
+        </p:spPr>
+        <p:style>
+          <a:lnRef idx="1">
+            <a:schemeClr val="accent1"/>
+          </a:lnRef>
+          <a:fillRef idx="3">
+            <a:schemeClr val="accent1"/>
+          </a:fillRef>
+          <a:effectRef idx="2">
+            <a:schemeClr val="accent1"/>
+          </a:effectRef>
+          <a:fontRef idx="minor">
+            <a:schemeClr val="lt1"/>
+          </a:fontRef>
+        </p:style>
+        <p:txBody>
+          <a:bodyPr rtlCol="0" anchor="ctr"/>
+          <a:lstStyle/>
+          <a:p>
+            <a:pPr algn="ctr"/>
+          </a:p>
+        </p:txBody>
+      </p:sp>
+      <p:sp>
+        <p:nvSpPr>
+          <p:cNvPr id="21" name="Isosceles Triangle 20">
+            <a:hlinkClick action="ppaction://hlinkshowjump?jump=lastslideviewed"/>
+          </p:cNvPr>
+          <p:cNvSpPr/>
+          <p:nvPr/>
+        </p:nvSpPr>
+        <p:spPr>
+          <a:xfrm>
+            <a:off x="777240" y="137160"/>
+            <a:ext cx="219456" cy="118872"/>
+          </a:xfrm>
+          <a:prstGeom prst="triangle">
+            <a:avLst/>
+          </a:prstGeom>
+          <a:solidFill>
+            <a:srgbClr val="6E6E6E"/>
+          </a:solidFill>
+          <a:ln>
+            <a:noFill/>
+          </a:ln>
+          <a:effectLst/>
+        </p:spPr>
+        <p:style>
+          <a:lnRef idx="1">
+            <a:schemeClr val="accent1"/>
+          </a:lnRef>
+          <a:fillRef idx="3">
+            <a:schemeClr val="accent1"/>
+          </a:fillRef>
+          <a:effectRef idx="2">
+            <a:schemeClr val="accent1"/>
+          </a:effectRef>
+          <a:fontRef idx="minor">
+            <a:schemeClr val="lt1"/>
+          </a:fontRef>
+        </p:style>
+        <p:txBody>
+          <a:bodyPr rtlCol="0" anchor="ctr"/>
+          <a:lstStyle/>
+          <a:p>
+            <a:pPr algn="ctr"/>
+          </a:p>
+        </p:txBody>
+      </p:sp>
+      <p:sp>
+        <p:nvSpPr>
+          <p:cNvPr id="22" name="Rectangle 21">
+            <a:hlinkClick action="ppaction://hlinkshowjump?jump=lastslideviewed"/>
+          </p:cNvPr>
+          <p:cNvSpPr/>
+          <p:nvPr/>
+        </p:nvSpPr>
+        <p:spPr>
+          <a:xfrm>
+            <a:off x="813816" y="246888"/>
+            <a:ext cx="146304" cy="118872"/>
+          </a:xfrm>
+          <a:prstGeom prst="rect">
+            <a:avLst/>
+          </a:prstGeom>
+          <a:solidFill>
+            <a:srgbClr val="6E6E6E"/>
+          </a:solidFill>
+          <a:ln>
+            <a:noFill/>
+          </a:ln>
+          <a:effectLst/>
+        </p:spPr>
+        <p:style>
+          <a:lnRef idx="1">
+            <a:schemeClr val="accent1"/>
+          </a:lnRef>
+          <a:fillRef idx="3">
+            <a:schemeClr val="accent1"/>
+          </a:fillRef>
+          <a:effectRef idx="2">
+            <a:schemeClr val="accent1"/>
+          </a:effectRef>
+          <a:fontRef idx="minor">
+            <a:schemeClr val="lt1"/>
+          </a:fontRef>
+        </p:style>
+        <p:txBody>
+          <a:bodyPr rtlCol="0" anchor="ctr"/>
+          <a:lstStyle/>
+          <a:p>
+            <a:pPr algn="ctr"/>
+          </a:p>
+        </p:txBody>
+      </p:sp>
+    </p:spTree>
+  </p:cSld>
+  <p:clrMapOvr>
+    <a:masterClrMapping/>
+  </p:clrMapOvr>
+</p:sld>
+</file>
+
 <file path=ppt/slides/slide2.xml><?xml version="1.0" encoding="utf-8"?>
 <p:sld xmlns:a="http://schemas.openxmlformats.org/drawingml/2006/main" xmlns:p="http://schemas.openxmlformats.org/presentationml/2006/main" xmlns:r="http://schemas.openxmlformats.org/officeDocument/2006/relationships">
   <p:cSld>
@@ -10644,45 +11498,6 @@
         <p:spPr>
           <a:xfrm>
             <a:off x="685800" y="502920"/>
-            <a:ext cx="8229600" cy="365760"/>
-          </a:xfrm>
-          <a:prstGeom prst="rect">
-            <a:avLst/>
-          </a:prstGeom>
-          <a:noFill/>
-        </p:spPr>
-        <p:txBody>
-          <a:bodyPr wrap="square" anchor="t" lIns="0" rIns="0" tIns="0" bIns="0">
-            <a:spAutoFit/>
-          </a:bodyPr>
-          <a:lstStyle/>
-          <a:p>
-            <a:pPr algn="l">
-              <a:lnSpc>
-                <a:spcPct val="100000"/>
-              </a:lnSpc>
-            </a:pPr>
-            <a:r>
-              <a:rPr sz="1300" b="1" spc="150">
-                <a:solidFill>
-                  <a:srgbClr val="EB0029"/>
-                </a:solidFill>
-                <a:latin typeface="Arial"/>
-              </a:rPr>
-              <a:t>O PROBLEMA</a:t>
-            </a:r>
-          </a:p>
-        </p:txBody>
-      </p:sp>
-      <p:sp>
-        <p:nvSpPr>
-          <p:cNvPr id="6" name="TextBox 5"/>
-          <p:cNvSpPr txBox="1"/>
-          <p:nvPr/>
-        </p:nvSpPr>
-        <p:spPr>
-          <a:xfrm>
-            <a:off x="685800" y="868680"/>
             <a:ext cx="10607040" cy="1188720"/>
           </a:xfrm>
           <a:prstGeom prst="rect">
@@ -10702,9 +11517,48 @@
               </a:lnSpc>
             </a:pPr>
             <a:r>
-              <a:rPr sz="2900" b="1">
+              <a:rPr sz="3200" b="1">
                 <a:solidFill>
                   <a:srgbClr val="1A1A1A"/>
+                </a:solidFill>
+                <a:latin typeface="Arial"/>
+              </a:rPr>
+              <a:t>O Problema</a:t>
+            </a:r>
+          </a:p>
+        </p:txBody>
+      </p:sp>
+      <p:sp>
+        <p:nvSpPr>
+          <p:cNvPr id="6" name="TextBox 5"/>
+          <p:cNvSpPr txBox="1"/>
+          <p:nvPr/>
+        </p:nvSpPr>
+        <p:spPr>
+          <a:xfrm>
+            <a:off x="685800" y="1170432"/>
+            <a:ext cx="10607040" cy="777240"/>
+          </a:xfrm>
+          <a:prstGeom prst="rect">
+            <a:avLst/>
+          </a:prstGeom>
+          <a:noFill/>
+        </p:spPr>
+        <p:txBody>
+          <a:bodyPr wrap="square" anchor="t" lIns="0" rIns="0" tIns="0" bIns="0">
+            <a:spAutoFit/>
+          </a:bodyPr>
+          <a:lstStyle/>
+          <a:p>
+            <a:pPr algn="l">
+              <a:lnSpc>
+                <a:spcPct val="120000"/>
+              </a:lnSpc>
+            </a:pPr>
+            <a:r>
+              <a:rPr sz="1650" b="0">
+                <a:solidFill>
+                  <a:srgbClr val="6E6E6E"/>
                 </a:solidFill>
                 <a:latin typeface="Arial"/>
               </a:rPr>
@@ -11719,45 +12573,6 @@
         <p:spPr>
           <a:xfrm>
             <a:off x="685800" y="502920"/>
-            <a:ext cx="8229600" cy="365760"/>
-          </a:xfrm>
-          <a:prstGeom prst="rect">
-            <a:avLst/>
-          </a:prstGeom>
-          <a:noFill/>
-        </p:spPr>
-        <p:txBody>
-          <a:bodyPr wrap="square" anchor="t" lIns="0" rIns="0" tIns="0" bIns="0">
-            <a:spAutoFit/>
-          </a:bodyPr>
-          <a:lstStyle/>
-          <a:p>
-            <a:pPr algn="l">
-              <a:lnSpc>
-                <a:spcPct val="100000"/>
-              </a:lnSpc>
-            </a:pPr>
-            <a:r>
-              <a:rPr sz="1300" b="1" spc="150">
-                <a:solidFill>
-                  <a:srgbClr val="EB0029"/>
-                </a:solidFill>
-                <a:latin typeface="Arial"/>
-              </a:rPr>
-              <a:t>OBJETIVO</a:t>
-            </a:r>
-          </a:p>
-        </p:txBody>
-      </p:sp>
-      <p:sp>
-        <p:nvSpPr>
-          <p:cNvPr id="6" name="TextBox 5"/>
-          <p:cNvSpPr txBox="1"/>
-          <p:nvPr/>
-        </p:nvSpPr>
-        <p:spPr>
-          <a:xfrm>
-            <a:off x="685800" y="868680"/>
             <a:ext cx="10607040" cy="1188720"/>
           </a:xfrm>
           <a:prstGeom prst="rect">
@@ -11777,9 +12592,48 @@
               </a:lnSpc>
             </a:pPr>
             <a:r>
-              <a:rPr sz="2900" b="1">
+              <a:rPr sz="3200" b="1">
                 <a:solidFill>
                   <a:srgbClr val="1A1A1A"/>
+                </a:solidFill>
+                <a:latin typeface="Arial"/>
+              </a:rPr>
+              <a:t>Objetivo</a:t>
+            </a:r>
+          </a:p>
+        </p:txBody>
+      </p:sp>
+      <p:sp>
+        <p:nvSpPr>
+          <p:cNvPr id="6" name="TextBox 5"/>
+          <p:cNvSpPr txBox="1"/>
+          <p:nvPr/>
+        </p:nvSpPr>
+        <p:spPr>
+          <a:xfrm>
+            <a:off x="685800" y="1170432"/>
+            <a:ext cx="10607040" cy="777240"/>
+          </a:xfrm>
+          <a:prstGeom prst="rect">
+            <a:avLst/>
+          </a:prstGeom>
+          <a:noFill/>
+        </p:spPr>
+        <p:txBody>
+          <a:bodyPr wrap="square" anchor="t" lIns="0" rIns="0" tIns="0" bIns="0">
+            <a:spAutoFit/>
+          </a:bodyPr>
+          <a:lstStyle/>
+          <a:p>
+            <a:pPr algn="l">
+              <a:lnSpc>
+                <a:spcPct val="120000"/>
+              </a:lnSpc>
+            </a:pPr>
+            <a:r>
+              <a:rPr sz="1650" b="0">
+                <a:solidFill>
+                  <a:srgbClr val="6E6E6E"/>
                 </a:solidFill>
                 <a:latin typeface="Arial"/>
               </a:rPr>
@@ -12704,45 +13558,6 @@
         <p:spPr>
           <a:xfrm>
             <a:off x="685800" y="502920"/>
-            <a:ext cx="8229600" cy="365760"/>
-          </a:xfrm>
-          <a:prstGeom prst="rect">
-            <a:avLst/>
-          </a:prstGeom>
-          <a:noFill/>
-        </p:spPr>
-        <p:txBody>
-          <a:bodyPr wrap="square" anchor="t" lIns="0" rIns="0" tIns="0" bIns="0">
-            <a:spAutoFit/>
-          </a:bodyPr>
-          <a:lstStyle/>
-          <a:p>
-            <a:pPr algn="l">
-              <a:lnSpc>
-                <a:spcPct val="100000"/>
-              </a:lnSpc>
-            </a:pPr>
-            <a:r>
-              <a:rPr sz="1300" b="1" spc="150">
-                <a:solidFill>
-                  <a:srgbClr val="EB0029"/>
-                </a:solidFill>
-                <a:latin typeface="Arial"/>
-              </a:rPr>
-              <a:t>OS DADOS</a:t>
-            </a:r>
-          </a:p>
-        </p:txBody>
-      </p:sp>
-      <p:sp>
-        <p:nvSpPr>
-          <p:cNvPr id="6" name="TextBox 5"/>
-          <p:cNvSpPr txBox="1"/>
-          <p:nvPr/>
-        </p:nvSpPr>
-        <p:spPr>
-          <a:xfrm>
-            <a:off x="685800" y="868680"/>
             <a:ext cx="10607040" cy="1188720"/>
           </a:xfrm>
           <a:prstGeom prst="rect">
@@ -12762,9 +13577,48 @@
               </a:lnSpc>
             </a:pPr>
             <a:r>
-              <a:rPr sz="2900" b="1">
+              <a:rPr sz="3200" b="1">
                 <a:solidFill>
                   <a:srgbClr val="1A1A1A"/>
+                </a:solidFill>
+                <a:latin typeface="Arial"/>
+              </a:rPr>
+              <a:t>Os Dados</a:t>
+            </a:r>
+          </a:p>
+        </p:txBody>
+      </p:sp>
+      <p:sp>
+        <p:nvSpPr>
+          <p:cNvPr id="6" name="TextBox 5"/>
+          <p:cNvSpPr txBox="1"/>
+          <p:nvPr/>
+        </p:nvSpPr>
+        <p:spPr>
+          <a:xfrm>
+            <a:off x="685800" y="1170432"/>
+            <a:ext cx="10607040" cy="777240"/>
+          </a:xfrm>
+          <a:prstGeom prst="rect">
+            <a:avLst/>
+          </a:prstGeom>
+          <a:noFill/>
+        </p:spPr>
+        <p:txBody>
+          <a:bodyPr wrap="square" anchor="t" lIns="0" rIns="0" tIns="0" bIns="0">
+            <a:spAutoFit/>
+          </a:bodyPr>
+          <a:lstStyle/>
+          <a:p>
+            <a:pPr algn="l">
+              <a:lnSpc>
+                <a:spcPct val="120000"/>
+              </a:lnSpc>
+            </a:pPr>
+            <a:r>
+              <a:rPr sz="1650" b="0">
+                <a:solidFill>
+                  <a:srgbClr val="6E6E6E"/>
                 </a:solidFill>
                 <a:latin typeface="Arial"/>
               </a:rPr>
@@ -13529,45 +14383,6 @@
         <p:spPr>
           <a:xfrm>
             <a:off x="685800" y="502920"/>
-            <a:ext cx="8229600" cy="365760"/>
-          </a:xfrm>
-          <a:prstGeom prst="rect">
-            <a:avLst/>
-          </a:prstGeom>
-          <a:noFill/>
-        </p:spPr>
-        <p:txBody>
-          <a:bodyPr wrap="square" anchor="t" lIns="0" rIns="0" tIns="0" bIns="0">
-            <a:spAutoFit/>
-          </a:bodyPr>
-          <a:lstStyle/>
-          <a:p>
-            <a:pPr algn="l">
-              <a:lnSpc>
-                <a:spcPct val="100000"/>
-              </a:lnSpc>
-            </a:pPr>
-            <a:r>
-              <a:rPr sz="1300" b="1" spc="150">
-                <a:solidFill>
-                  <a:srgbClr val="EB0029"/>
-                </a:solidFill>
-                <a:latin typeface="Arial"/>
-              </a:rPr>
-              <a:t>PREPARAÇÃO DOS DADOS</a:t>
-            </a:r>
-          </a:p>
-        </p:txBody>
-      </p:sp>
-      <p:sp>
-        <p:nvSpPr>
-          <p:cNvPr id="6" name="TextBox 5"/>
-          <p:cNvSpPr txBox="1"/>
-          <p:nvPr/>
-        </p:nvSpPr>
-        <p:spPr>
-          <a:xfrm>
-            <a:off x="685800" y="868680"/>
             <a:ext cx="10607040" cy="1188720"/>
           </a:xfrm>
           <a:prstGeom prst="rect">
@@ -13587,9 +14402,48 @@
               </a:lnSpc>
             </a:pPr>
             <a:r>
-              <a:rPr sz="2900" b="1">
+              <a:rPr sz="3200" b="1">
                 <a:solidFill>
                   <a:srgbClr val="1A1A1A"/>
+                </a:solidFill>
+                <a:latin typeface="Arial"/>
+              </a:rPr>
+              <a:t>Preparação dos Dados</a:t>
+            </a:r>
+          </a:p>
+        </p:txBody>
+      </p:sp>
+      <p:sp>
+        <p:nvSpPr>
+          <p:cNvPr id="6" name="TextBox 5"/>
+          <p:cNvSpPr txBox="1"/>
+          <p:nvPr/>
+        </p:nvSpPr>
+        <p:spPr>
+          <a:xfrm>
+            <a:off x="685800" y="1170432"/>
+            <a:ext cx="10607040" cy="777240"/>
+          </a:xfrm>
+          <a:prstGeom prst="rect">
+            <a:avLst/>
+          </a:prstGeom>
+          <a:noFill/>
+        </p:spPr>
+        <p:txBody>
+          <a:bodyPr wrap="square" anchor="t" lIns="0" rIns="0" tIns="0" bIns="0">
+            <a:spAutoFit/>
+          </a:bodyPr>
+          <a:lstStyle/>
+          <a:p>
+            <a:pPr algn="l">
+              <a:lnSpc>
+                <a:spcPct val="120000"/>
+              </a:lnSpc>
+            </a:pPr>
+            <a:r>
+              <a:rPr sz="1650" b="0">
+                <a:solidFill>
+                  <a:srgbClr val="6E6E6E"/>
                 </a:solidFill>
                 <a:latin typeface="Arial"/>
               </a:rPr>
@@ -15119,45 +15973,6 @@
         <p:spPr>
           <a:xfrm>
             <a:off x="685800" y="502920"/>
-            <a:ext cx="8229600" cy="365760"/>
-          </a:xfrm>
-          <a:prstGeom prst="rect">
-            <a:avLst/>
-          </a:prstGeom>
-          <a:noFill/>
-        </p:spPr>
-        <p:txBody>
-          <a:bodyPr wrap="square" anchor="t" lIns="0" rIns="0" tIns="0" bIns="0">
-            <a:spAutoFit/>
-          </a:bodyPr>
-          <a:lstStyle/>
-          <a:p>
-            <a:pPr algn="l">
-              <a:lnSpc>
-                <a:spcPct val="100000"/>
-              </a:lnSpc>
-            </a:pPr>
-            <a:r>
-              <a:rPr sz="1300" b="1" spc="150">
-                <a:solidFill>
-                  <a:srgbClr val="EB0029"/>
-                </a:solidFill>
-                <a:latin typeface="Arial"/>
-              </a:rPr>
-              <a:t>ANÁLISE EXPLORATÓRIA</a:t>
-            </a:r>
-          </a:p>
-        </p:txBody>
-      </p:sp>
-      <p:sp>
-        <p:nvSpPr>
-          <p:cNvPr id="6" name="TextBox 5"/>
-          <p:cNvSpPr txBox="1"/>
-          <p:nvPr/>
-        </p:nvSpPr>
-        <p:spPr>
-          <a:xfrm>
-            <a:off x="685800" y="868680"/>
             <a:ext cx="10607040" cy="1188720"/>
           </a:xfrm>
           <a:prstGeom prst="rect">
@@ -15177,9 +15992,48 @@
               </a:lnSpc>
             </a:pPr>
             <a:r>
-              <a:rPr sz="2700" b="1">
+              <a:rPr sz="3200" b="1">
                 <a:solidFill>
                   <a:srgbClr val="1A1A1A"/>
+                </a:solidFill>
+                <a:latin typeface="Arial"/>
+              </a:rPr>
+              <a:t>Análise Exploratória</a:t>
+            </a:r>
+          </a:p>
+        </p:txBody>
+      </p:sp>
+      <p:sp>
+        <p:nvSpPr>
+          <p:cNvPr id="6" name="TextBox 5"/>
+          <p:cNvSpPr txBox="1"/>
+          <p:nvPr/>
+        </p:nvSpPr>
+        <p:spPr>
+          <a:xfrm>
+            <a:off x="685800" y="1170432"/>
+            <a:ext cx="10607040" cy="777240"/>
+          </a:xfrm>
+          <a:prstGeom prst="rect">
+            <a:avLst/>
+          </a:prstGeom>
+          <a:noFill/>
+        </p:spPr>
+        <p:txBody>
+          <a:bodyPr wrap="square" anchor="t" lIns="0" rIns="0" tIns="0" bIns="0">
+            <a:spAutoFit/>
+          </a:bodyPr>
+          <a:lstStyle/>
+          <a:p>
+            <a:pPr algn="l">
+              <a:lnSpc>
+                <a:spcPct val="120000"/>
+              </a:lnSpc>
+            </a:pPr>
+            <a:r>
+              <a:rPr sz="1650" b="0">
+                <a:solidFill>
+                  <a:srgbClr val="6E6E6E"/>
                 </a:solidFill>
                 <a:latin typeface="Arial"/>
               </a:rPr>
@@ -15615,8 +16469,8 @@
         </p:nvSpPr>
         <p:spPr>
           <a:xfrm>
-            <a:off x="685800" y="5532120"/>
-            <a:ext cx="10817352" cy="685800"/>
+            <a:off x="685800" y="5486400"/>
+            <a:ext cx="10817352" cy="777240"/>
           </a:xfrm>
           <a:prstGeom prst="roundRect">
             <a:avLst>
@@ -15661,8 +16515,8 @@
         </p:nvSpPr>
         <p:spPr>
           <a:xfrm>
-            <a:off x="914400" y="5632704"/>
-            <a:ext cx="8595360" cy="502920"/>
+            <a:off x="914400" y="5577840"/>
+            <a:ext cx="8961120" cy="228600"/>
           </a:xfrm>
           <a:prstGeom prst="rect">
             <a:avLst/>
@@ -15670,32 +16524,126 @@
           <a:noFill/>
         </p:spPr>
         <p:txBody>
-          <a:bodyPr wrap="square" anchor="ctr" lIns="0" rIns="0" tIns="0" bIns="0">
+          <a:bodyPr wrap="square" anchor="t" lIns="0" rIns="0" tIns="0" bIns="0">
             <a:spAutoFit/>
           </a:bodyPr>
           <a:lstStyle/>
           <a:p>
             <a:pPr algn="l">
               <a:lnSpc>
-                <a:spcPct val="120000"/>
+                <a:spcPct val="100000"/>
               </a:lnSpc>
             </a:pPr>
             <a:r>
-              <a:rPr sz="1100" b="0">
-                <a:solidFill>
-                  <a:srgbClr val="1A1A1A"/>
+              <a:rPr sz="1050" b="1" spc="70">
+                <a:solidFill>
+                  <a:srgbClr val="EB0029"/>
                 </a:solidFill>
                 <a:latin typeface="Arial"/>
               </a:rPr>
-              <a:t>Decisão em 2 etapas, a mais difícil do projeto: das quase 420 variáveis da PNAD, 22 entraram no pré-processamento por relevância direta. Dessas, 15 seguiram para o modelo, 2 delas (sexo e raça) por escopo obrigatório do projeto, não por força estatística.</a:t>
-            </a:r>
-          </a:p>
-        </p:txBody>
-      </p:sp>
-      <p:sp>
-        <p:nvSpPr>
-          <p:cNvPr id="19" name="Oval 18">
+              <a:t>DECISÃO DE VARIÁVEIS, A MAIS DIFÍCIL DO PROJETO</a:t>
+            </a:r>
+          </a:p>
+        </p:txBody>
+      </p:sp>
+      <p:sp>
+        <p:nvSpPr>
+          <p:cNvPr id="19" name="TextBox 18"/>
+          <p:cNvSpPr txBox="1"/>
+          <p:nvPr/>
+        </p:nvSpPr>
+        <p:spPr>
+          <a:xfrm>
+            <a:off x="914400" y="5815584"/>
+            <a:ext cx="8869680" cy="411480"/>
+          </a:xfrm>
+          <a:prstGeom prst="rect">
+            <a:avLst/>
+          </a:prstGeom>
+          <a:noFill/>
+        </p:spPr>
+        <p:txBody>
+          <a:bodyPr wrap="square" anchor="t" lIns="0" rIns="0" tIns="0" bIns="0">
+            <a:spAutoFit/>
+          </a:bodyPr>
+          <a:lstStyle/>
+          <a:p>
+            <a:pPr algn="l">
+              <a:lnSpc>
+                <a:spcPct val="115000"/>
+              </a:lnSpc>
+            </a:pPr>
+            <a:r>
+              <a:rPr sz="1050" b="0">
+                <a:solidFill>
+                  <a:srgbClr val="1A1A1A"/>
+                </a:solidFill>
+                <a:latin typeface="Arial"/>
+              </a:rPr>
+              <a:t>Das quase 420 variáveis da PNAD, 22 entraram no pré-processamento por relevância direta. Dessas, 15 seguiram para o modelo: 2 delas (sexo e raça) por escopo obrigatório do projeto, não por força estatística.</a:t>
+            </a:r>
+          </a:p>
+        </p:txBody>
+      </p:sp>
+      <p:sp>
+        <p:nvSpPr>
+          <p:cNvPr id="20" name="Oval 19">
             <a:hlinkClick action="ppaction://hlinksldjump" r:id="rId4"/>
+          </p:cNvPr>
+          <p:cNvSpPr/>
+          <p:nvPr/>
+        </p:nvSpPr>
+        <p:spPr>
+          <a:xfrm>
+            <a:off x="11082528" y="3730752"/>
+            <a:ext cx="365760" cy="365760"/>
+          </a:xfrm>
+          <a:prstGeom prst="ellipse">
+            <a:avLst/>
+          </a:prstGeom>
+          <a:solidFill>
+            <a:srgbClr val="1A1A1A"/>
+          </a:solidFill>
+          <a:ln>
+            <a:noFill/>
+          </a:ln>
+          <a:effectLst/>
+        </p:spPr>
+        <p:style>
+          <a:lnRef idx="1">
+            <a:schemeClr val="accent1"/>
+          </a:lnRef>
+          <a:fillRef idx="3">
+            <a:schemeClr val="accent1"/>
+          </a:fillRef>
+          <a:effectRef idx="2">
+            <a:schemeClr val="accent1"/>
+          </a:effectRef>
+          <a:fontRef idx="minor">
+            <a:schemeClr val="lt1"/>
+          </a:fontRef>
+        </p:style>
+        <p:txBody>
+          <a:bodyPr rtlCol="0" anchor="ctr" wrap="none" lIns="0" rIns="0" tIns="0" bIns="0"/>
+          <a:lstStyle/>
+          <a:p>
+            <a:pPr algn="ctr"/>
+            <a:r>
+              <a:rPr sz="1800" b="1">
+                <a:solidFill>
+                  <a:srgbClr val="FFFFFF"/>
+                </a:solidFill>
+                <a:latin typeface="Arial"/>
+              </a:rPr>
+              <a:t>+</a:t>
+            </a:r>
+          </a:p>
+        </p:txBody>
+      </p:sp>
+      <p:sp>
+        <p:nvSpPr>
+          <p:cNvPr id="21" name="Oval 20">
+            <a:hlinkClick action="ppaction://hlinksldjump" r:id="rId5"/>
           </p:cNvPr>
           <p:cNvSpPr/>
           <p:nvPr/>
@@ -15886,45 +16834,6 @@
         <p:spPr>
           <a:xfrm>
             <a:off x="685800" y="502920"/>
-            <a:ext cx="8229600" cy="365760"/>
-          </a:xfrm>
-          <a:prstGeom prst="rect">
-            <a:avLst/>
-          </a:prstGeom>
-          <a:noFill/>
-        </p:spPr>
-        <p:txBody>
-          <a:bodyPr wrap="square" anchor="t" lIns="0" rIns="0" tIns="0" bIns="0">
-            <a:spAutoFit/>
-          </a:bodyPr>
-          <a:lstStyle/>
-          <a:p>
-            <a:pPr algn="l">
-              <a:lnSpc>
-                <a:spcPct val="100000"/>
-              </a:lnSpc>
-            </a:pPr>
-            <a:r>
-              <a:rPr sz="1300" b="1" spc="150">
-                <a:solidFill>
-                  <a:srgbClr val="EB0029"/>
-                </a:solidFill>
-                <a:latin typeface="Arial"/>
-              </a:rPr>
-              <a:t>A SOLUÇÃO</a:t>
-            </a:r>
-          </a:p>
-        </p:txBody>
-      </p:sp>
-      <p:sp>
-        <p:nvSpPr>
-          <p:cNvPr id="6" name="TextBox 5"/>
-          <p:cNvSpPr txBox="1"/>
-          <p:nvPr/>
-        </p:nvSpPr>
-        <p:spPr>
-          <a:xfrm>
-            <a:off x="685800" y="868680"/>
             <a:ext cx="10607040" cy="1188720"/>
           </a:xfrm>
           <a:prstGeom prst="rect">
@@ -15944,9 +16853,48 @@
               </a:lnSpc>
             </a:pPr>
             <a:r>
-              <a:rPr sz="2900" b="1">
+              <a:rPr sz="3200" b="1">
                 <a:solidFill>
                   <a:srgbClr val="1A1A1A"/>
+                </a:solidFill>
+                <a:latin typeface="Arial"/>
+              </a:rPr>
+              <a:t>A Solução</a:t>
+            </a:r>
+          </a:p>
+        </p:txBody>
+      </p:sp>
+      <p:sp>
+        <p:nvSpPr>
+          <p:cNvPr id="6" name="TextBox 5"/>
+          <p:cNvSpPr txBox="1"/>
+          <p:nvPr/>
+        </p:nvSpPr>
+        <p:spPr>
+          <a:xfrm>
+            <a:off x="685800" y="1170432"/>
+            <a:ext cx="10607040" cy="777240"/>
+          </a:xfrm>
+          <a:prstGeom prst="rect">
+            <a:avLst/>
+          </a:prstGeom>
+          <a:noFill/>
+        </p:spPr>
+        <p:txBody>
+          <a:bodyPr wrap="square" anchor="t" lIns="0" rIns="0" tIns="0" bIns="0">
+            <a:spAutoFit/>
+          </a:bodyPr>
+          <a:lstStyle/>
+          <a:p>
+            <a:pPr algn="l">
+              <a:lnSpc>
+                <a:spcPct val="120000"/>
+              </a:lnSpc>
+            </a:pPr>
+            <a:r>
+              <a:rPr sz="1650" b="0">
+                <a:solidFill>
+                  <a:srgbClr val="6E6E6E"/>
                 </a:solidFill>
                 <a:latin typeface="Arial"/>
               </a:rPr>
@@ -17233,45 +18181,6 @@
         <p:spPr>
           <a:xfrm>
             <a:off x="685800" y="502920"/>
-            <a:ext cx="8229600" cy="365760"/>
-          </a:xfrm>
-          <a:prstGeom prst="rect">
-            <a:avLst/>
-          </a:prstGeom>
-          <a:noFill/>
-        </p:spPr>
-        <p:txBody>
-          <a:bodyPr wrap="square" anchor="t" lIns="0" rIns="0" tIns="0" bIns="0">
-            <a:spAutoFit/>
-          </a:bodyPr>
-          <a:lstStyle/>
-          <a:p>
-            <a:pPr algn="l">
-              <a:lnSpc>
-                <a:spcPct val="100000"/>
-              </a:lnSpc>
-            </a:pPr>
-            <a:r>
-              <a:rPr sz="1300" b="1" spc="150">
-                <a:solidFill>
-                  <a:srgbClr val="EB0029"/>
-                </a:solidFill>
-                <a:latin typeface="Arial"/>
-              </a:rPr>
-              <a:t>A CONSTRUÇÃO DO MODELO</a:t>
-            </a:r>
-          </a:p>
-        </p:txBody>
-      </p:sp>
-      <p:sp>
-        <p:nvSpPr>
-          <p:cNvPr id="6" name="TextBox 5"/>
-          <p:cNvSpPr txBox="1"/>
-          <p:nvPr/>
-        </p:nvSpPr>
-        <p:spPr>
-          <a:xfrm>
-            <a:off x="685800" y="868680"/>
             <a:ext cx="10607040" cy="1188720"/>
           </a:xfrm>
           <a:prstGeom prst="rect">
@@ -17291,9 +18200,48 @@
               </a:lnSpc>
             </a:pPr>
             <a:r>
-              <a:rPr sz="2900" b="1">
+              <a:rPr sz="3200" b="1">
                 <a:solidFill>
                   <a:srgbClr val="1A1A1A"/>
+                </a:solidFill>
+                <a:latin typeface="Arial"/>
+              </a:rPr>
+              <a:t>Modelagem</a:t>
+            </a:r>
+          </a:p>
+        </p:txBody>
+      </p:sp>
+      <p:sp>
+        <p:nvSpPr>
+          <p:cNvPr id="6" name="TextBox 5"/>
+          <p:cNvSpPr txBox="1"/>
+          <p:nvPr/>
+        </p:nvSpPr>
+        <p:spPr>
+          <a:xfrm>
+            <a:off x="685800" y="1170432"/>
+            <a:ext cx="10607040" cy="777240"/>
+          </a:xfrm>
+          <a:prstGeom prst="rect">
+            <a:avLst/>
+          </a:prstGeom>
+          <a:noFill/>
+        </p:spPr>
+        <p:txBody>
+          <a:bodyPr wrap="square" anchor="t" lIns="0" rIns="0" tIns="0" bIns="0">
+            <a:spAutoFit/>
+          </a:bodyPr>
+          <a:lstStyle/>
+          <a:p>
+            <a:pPr algn="l">
+              <a:lnSpc>
+                <a:spcPct val="120000"/>
+              </a:lnSpc>
+            </a:pPr>
+            <a:r>
+              <a:rPr sz="1650" b="0">
+                <a:solidFill>
+                  <a:srgbClr val="6E6E6E"/>
                 </a:solidFill>
                 <a:latin typeface="Arial"/>
               </a:rPr>
@@ -18148,45 +19096,6 @@
         <p:spPr>
           <a:xfrm>
             <a:off x="685800" y="502920"/>
-            <a:ext cx="8229600" cy="365760"/>
-          </a:xfrm>
-          <a:prstGeom prst="rect">
-            <a:avLst/>
-          </a:prstGeom>
-          <a:noFill/>
-        </p:spPr>
-        <p:txBody>
-          <a:bodyPr wrap="square" anchor="t" lIns="0" rIns="0" tIns="0" bIns="0">
-            <a:spAutoFit/>
-          </a:bodyPr>
-          <a:lstStyle/>
-          <a:p>
-            <a:pPr algn="l">
-              <a:lnSpc>
-                <a:spcPct val="100000"/>
-              </a:lnSpc>
-            </a:pPr>
-            <a:r>
-              <a:rPr sz="1300" b="1" spc="150">
-                <a:solidFill>
-                  <a:srgbClr val="EB0029"/>
-                </a:solidFill>
-                <a:latin typeface="Arial"/>
-              </a:rPr>
-              <a:t>INTERPRETABILIDADE E EQUIDADE</a:t>
-            </a:r>
-          </a:p>
-        </p:txBody>
-      </p:sp>
-      <p:sp>
-        <p:nvSpPr>
-          <p:cNvPr id="6" name="TextBox 5"/>
-          <p:cNvSpPr txBox="1"/>
-          <p:nvPr/>
-        </p:nvSpPr>
-        <p:spPr>
-          <a:xfrm>
-            <a:off x="685800" y="868680"/>
             <a:ext cx="10607040" cy="1188720"/>
           </a:xfrm>
           <a:prstGeom prst="rect">
@@ -18206,9 +19115,48 @@
               </a:lnSpc>
             </a:pPr>
             <a:r>
-              <a:rPr sz="2700" b="1">
+              <a:rPr sz="3200" b="1">
                 <a:solidFill>
                   <a:srgbClr val="1A1A1A"/>
+                </a:solidFill>
+                <a:latin typeface="Arial"/>
+              </a:rPr>
+              <a:t>Interpretabilidade e Equidade</a:t>
+            </a:r>
+          </a:p>
+        </p:txBody>
+      </p:sp>
+      <p:sp>
+        <p:nvSpPr>
+          <p:cNvPr id="6" name="TextBox 5"/>
+          <p:cNvSpPr txBox="1"/>
+          <p:nvPr/>
+        </p:nvSpPr>
+        <p:spPr>
+          <a:xfrm>
+            <a:off x="685800" y="1170432"/>
+            <a:ext cx="10607040" cy="777240"/>
+          </a:xfrm>
+          <a:prstGeom prst="rect">
+            <a:avLst/>
+          </a:prstGeom>
+          <a:noFill/>
+        </p:spPr>
+        <p:txBody>
+          <a:bodyPr wrap="square" anchor="t" lIns="0" rIns="0" tIns="0" bIns="0">
+            <a:spAutoFit/>
+          </a:bodyPr>
+          <a:lstStyle/>
+          <a:p>
+            <a:pPr algn="l">
+              <a:lnSpc>
+                <a:spcPct val="120000"/>
+              </a:lnSpc>
+            </a:pPr>
+            <a:r>
+              <a:rPr sz="1650" b="0">
+                <a:solidFill>
+                  <a:srgbClr val="6E6E6E"/>
                 </a:solidFill>
                 <a:latin typeface="Arial"/>
               </a:rPr>

--- a/apresentacao/InformalidadeBR - Apresentacao.pptx
+++ b/apresentacao/InformalidadeBR - Apresentacao.pptx
@@ -8640,11 +8640,11 @@
   <p:clrMapOvr>
     <a:masterClrMapping/>
   </p:clrMapOvr>
-  <mc:AlternateContent xmlns:mc="http://schemas.openxmlformats.org/markup-compatibility/2006">
-    <mc:Choice xmlns:p14="http://schemas.microsoft.com/office/powerpoint/2010/main" Requires="p14">
+  <mc:AlternateContent xmlns:mc="http://schemas.openxmlformats.org/markup-compatibility/2006" xmlns:p14="http://schemas.microsoft.com/office/powerpoint/2010/main">
+    <mc:Choice Requires="p14">
       <p:transition spd="slow" p14:dur="2000"/>
     </mc:Choice>
-    <mc:Fallback>
+    <mc:Fallback xmlns="">
       <p:transition spd="slow"/>
     </mc:Fallback>
   </mc:AlternateContent>
@@ -9967,11 +9967,11 @@
   <p:clrMapOvr>
     <a:masterClrMapping/>
   </p:clrMapOvr>
-  <mc:AlternateContent xmlns:mc="http://schemas.openxmlformats.org/markup-compatibility/2006">
-    <mc:Choice xmlns:p14="http://schemas.microsoft.com/office/powerpoint/2010/main" Requires="p14">
+  <mc:AlternateContent xmlns:mc="http://schemas.openxmlformats.org/markup-compatibility/2006" xmlns:p14="http://schemas.microsoft.com/office/powerpoint/2010/main">
+    <mc:Choice Requires="p14">
       <p:transition spd="slow" p14:dur="2000"/>
     </mc:Choice>
-    <mc:Fallback>
+    <mc:Fallback xmlns="">
       <p:transition spd="slow"/>
     </mc:Fallback>
   </mc:AlternateContent>
@@ -11949,11 +11949,11 @@
   <p:clrMapOvr>
     <a:masterClrMapping/>
   </p:clrMapOvr>
-  <mc:AlternateContent xmlns:mc="http://schemas.openxmlformats.org/markup-compatibility/2006">
-    <mc:Choice xmlns:p14="http://schemas.microsoft.com/office/powerpoint/2010/main" Requires="p14">
+  <mc:AlternateContent xmlns:mc="http://schemas.openxmlformats.org/markup-compatibility/2006" xmlns:p14="http://schemas.microsoft.com/office/powerpoint/2010/main">
+    <mc:Choice Requires="p14">
       <p:transition spd="slow" p14:dur="2000"/>
     </mc:Choice>
-    <mc:Fallback>
+    <mc:Fallback xmlns="">
       <p:transition spd="slow"/>
     </mc:Fallback>
   </mc:AlternateContent>
@@ -12419,11 +12419,11 @@
   <p:clrMapOvr>
     <a:masterClrMapping/>
   </p:clrMapOvr>
-  <mc:AlternateContent xmlns:mc="http://schemas.openxmlformats.org/markup-compatibility/2006">
-    <mc:Choice xmlns:p14="http://schemas.microsoft.com/office/powerpoint/2010/main" Requires="p14">
+  <mc:AlternateContent xmlns:mc="http://schemas.openxmlformats.org/markup-compatibility/2006" xmlns:p14="http://schemas.microsoft.com/office/powerpoint/2010/main">
+    <mc:Choice Requires="p14">
       <p:transition spd="slow" p14:dur="2000"/>
     </mc:Choice>
-    <mc:Fallback>
+    <mc:Fallback xmlns="">
       <p:transition spd="slow"/>
     </mc:Fallback>
   </mc:AlternateContent>
@@ -13288,11 +13288,11 @@
   <p:clrMapOvr>
     <a:masterClrMapping/>
   </p:clrMapOvr>
-  <mc:AlternateContent xmlns:mc="http://schemas.openxmlformats.org/markup-compatibility/2006">
-    <mc:Choice xmlns:p14="http://schemas.microsoft.com/office/powerpoint/2010/main" Requires="p14">
+  <mc:AlternateContent xmlns:mc="http://schemas.openxmlformats.org/markup-compatibility/2006" xmlns:p14="http://schemas.microsoft.com/office/powerpoint/2010/main">
+    <mc:Choice Requires="p14">
       <p:transition spd="slow" p14:dur="2000"/>
     </mc:Choice>
-    <mc:Fallback>
+    <mc:Fallback xmlns="">
       <p:transition spd="slow"/>
     </mc:Fallback>
   </mc:AlternateContent>
